--- a/Dokumente/Abschlussprojekt_2026_api-1_durani_f1-app.pptx
+++ b/Dokumente/Abschlussprojekt_2026_api-1_durani_f1-app.pptx
@@ -2694,7 +2694,7 @@
 <dgm:dataModel xmlns:dgm="http://schemas.openxmlformats.org/drawingml/2006/diagram" xmlns:a="http://schemas.openxmlformats.org/drawingml/2006/main">
   <dgm:ptLst>
     <dgm:pt modelId="{A73E86A9-C38F-410B-9248-0B156E4406B0}" type="doc">
-      <dgm:prSet loTypeId="urn:microsoft.com/office/officeart/2008/layout/LinedList" loCatId="list" qsTypeId="urn:microsoft.com/office/officeart/2005/8/quickstyle/simple1" qsCatId="simple" csTypeId="urn:microsoft.com/office/officeart/2005/8/colors/accent3_1" csCatId="accent3"/>
+      <dgm:prSet loTypeId="urn:microsoft.com/office/officeart/2008/layout/LinedList" loCatId="list" qsTypeId="urn:microsoft.com/office/officeart/2005/8/quickstyle/simple1" qsCatId="simple" csTypeId="urn:microsoft.com/office/officeart/2005/8/colors/accent3_1" csCatId="accent3" phldr="1"/>
       <dgm:spPr/>
       <dgm:t>
         <a:bodyPr/>
@@ -2823,10 +2823,10 @@
         <a:lstStyle/>
         <a:p>
           <a:r>
-            <a:rPr lang="de-CH"/>
-            <a:t>Pros/Contras - was lief gut, was lief gut</a:t>
+            <a:rPr lang="de-CH" dirty="0"/>
+            <a:t>Pros/Contras - was lief gut, was lief nicht gut</a:t>
           </a:r>
-          <a:endParaRPr lang="en-US"/>
+          <a:endParaRPr lang="en-US" dirty="0"/>
         </a:p>
       </dgm:t>
     </dgm:pt>
@@ -3441,10 +3441,10 @@
             </a:lnSpc>
           </a:pPr>
           <a:r>
-            <a:rPr lang="de-DE"/>
-            <a:t>Ich hoffe es hat euch gefallen! </a:t>
+            <a:rPr lang="de-CH" dirty="0"/>
+            <a:t>Ich hoffe, es hat euch gefallen!</a:t>
           </a:r>
-          <a:endParaRPr lang="en-US"/>
+          <a:endParaRPr lang="en-US" dirty="0"/>
         </a:p>
       </dgm:t>
     </dgm:pt>
@@ -3483,8 +3483,8 @@
             </a:lnSpc>
           </a:pPr>
           <a:r>
-            <a:rPr lang="de-DE" dirty="0"/>
-            <a:t>Wenn ihr noch fragen habt könnt ihr diese jetzt stellen.</a:t>
+            <a:rPr lang="de-CH" dirty="0"/>
+            <a:t>Wenn ihr noch Fragen habt, könnt ihr diese jetzt stellen.</a:t>
           </a:r>
           <a:endParaRPr lang="en-US" dirty="0"/>
         </a:p>
@@ -3737,12 +3737,12 @@
         <a:fontRef idx="minor"/>
       </dsp:style>
       <dsp:txBody>
-        <a:bodyPr spcFirstLastPara="0" vert="horz" wrap="square" lIns="125730" tIns="125730" rIns="125730" bIns="125730" numCol="1" spcCol="1270" anchor="t" anchorCtr="0">
+        <a:bodyPr spcFirstLastPara="0" vert="horz" wrap="square" lIns="110490" tIns="110490" rIns="110490" bIns="110490" numCol="1" spcCol="1270" anchor="t" anchorCtr="0">
           <a:noAutofit/>
         </a:bodyPr>
         <a:lstStyle/>
         <a:p>
-          <a:pPr marL="0" lvl="0" indent="0" algn="l" defTabSz="1466850">
+          <a:pPr marL="0" lvl="0" indent="0" algn="l" defTabSz="1289050">
             <a:lnSpc>
               <a:spcPct val="90000"/>
             </a:lnSpc>
@@ -3755,10 +3755,10 @@
             <a:buNone/>
           </a:pPr>
           <a:r>
-            <a:rPr lang="de-CH" sz="3300" kern="1200"/>
+            <a:rPr lang="de-CH" sz="2900" kern="1200"/>
             <a:t>Thema</a:t>
           </a:r>
-          <a:endParaRPr lang="en-US" sz="3300" kern="1200"/>
+          <a:endParaRPr lang="en-US" sz="2900" kern="1200"/>
         </a:p>
       </dsp:txBody>
       <dsp:txXfrm>
@@ -3849,12 +3849,12 @@
         <a:fontRef idx="minor"/>
       </dsp:style>
       <dsp:txBody>
-        <a:bodyPr spcFirstLastPara="0" vert="horz" wrap="square" lIns="125730" tIns="125730" rIns="125730" bIns="125730" numCol="1" spcCol="1270" anchor="t" anchorCtr="0">
+        <a:bodyPr spcFirstLastPara="0" vert="horz" wrap="square" lIns="110490" tIns="110490" rIns="110490" bIns="110490" numCol="1" spcCol="1270" anchor="t" anchorCtr="0">
           <a:noAutofit/>
         </a:bodyPr>
         <a:lstStyle/>
         <a:p>
-          <a:pPr marL="0" lvl="0" indent="0" algn="l" defTabSz="1466850">
+          <a:pPr marL="0" lvl="0" indent="0" algn="l" defTabSz="1289050">
             <a:lnSpc>
               <a:spcPct val="90000"/>
             </a:lnSpc>
@@ -3867,10 +3867,10 @@
             <a:buNone/>
           </a:pPr>
           <a:r>
-            <a:rPr lang="de-CH" sz="3300" kern="1200"/>
+            <a:rPr lang="de-CH" sz="2900" kern="1200"/>
             <a:t>Ziele</a:t>
           </a:r>
-          <a:endParaRPr lang="en-US" sz="3300" kern="1200"/>
+          <a:endParaRPr lang="en-US" sz="2900" kern="1200"/>
         </a:p>
       </dsp:txBody>
       <dsp:txXfrm>
@@ -3961,12 +3961,12 @@
         <a:fontRef idx="minor"/>
       </dsp:style>
       <dsp:txBody>
-        <a:bodyPr spcFirstLastPara="0" vert="horz" wrap="square" lIns="125730" tIns="125730" rIns="125730" bIns="125730" numCol="1" spcCol="1270" anchor="t" anchorCtr="0">
+        <a:bodyPr spcFirstLastPara="0" vert="horz" wrap="square" lIns="110490" tIns="110490" rIns="110490" bIns="110490" numCol="1" spcCol="1270" anchor="t" anchorCtr="0">
           <a:noAutofit/>
         </a:bodyPr>
         <a:lstStyle/>
         <a:p>
-          <a:pPr marL="0" lvl="0" indent="0" algn="l" defTabSz="1466850">
+          <a:pPr marL="0" lvl="0" indent="0" algn="l" defTabSz="1289050">
             <a:lnSpc>
               <a:spcPct val="90000"/>
             </a:lnSpc>
@@ -3979,10 +3979,10 @@
             <a:buNone/>
           </a:pPr>
           <a:r>
-            <a:rPr lang="de-CH" sz="3300" kern="1200" dirty="0"/>
+            <a:rPr lang="de-CH" sz="2900" kern="1200" dirty="0"/>
             <a:t>Demonstration</a:t>
           </a:r>
-          <a:endParaRPr lang="en-US" sz="3300" kern="1200" dirty="0"/>
+          <a:endParaRPr lang="en-US" sz="2900" kern="1200" dirty="0"/>
         </a:p>
       </dsp:txBody>
       <dsp:txXfrm>
@@ -4073,12 +4073,12 @@
         <a:fontRef idx="minor"/>
       </dsp:style>
       <dsp:txBody>
-        <a:bodyPr spcFirstLastPara="0" vert="horz" wrap="square" lIns="125730" tIns="125730" rIns="125730" bIns="125730" numCol="1" spcCol="1270" anchor="t" anchorCtr="0">
+        <a:bodyPr spcFirstLastPara="0" vert="horz" wrap="square" lIns="110490" tIns="110490" rIns="110490" bIns="110490" numCol="1" spcCol="1270" anchor="t" anchorCtr="0">
           <a:noAutofit/>
         </a:bodyPr>
         <a:lstStyle/>
         <a:p>
-          <a:pPr marL="0" lvl="0" indent="0" algn="l" defTabSz="1466850">
+          <a:pPr marL="0" lvl="0" indent="0" algn="l" defTabSz="1289050">
             <a:lnSpc>
               <a:spcPct val="90000"/>
             </a:lnSpc>
@@ -4091,10 +4091,10 @@
             <a:buNone/>
           </a:pPr>
           <a:r>
-            <a:rPr lang="de-CH" sz="3300" kern="1200"/>
-            <a:t>Pros/Contras - was lief gut, was lief gut</a:t>
+            <a:rPr lang="de-CH" sz="2900" kern="1200" dirty="0"/>
+            <a:t>Pros/Contras - was lief gut, was lief nicht gut</a:t>
           </a:r>
-          <a:endParaRPr lang="en-US" sz="3300" kern="1200"/>
+          <a:endParaRPr lang="en-US" sz="2900" kern="1200" dirty="0"/>
         </a:p>
       </dsp:txBody>
       <dsp:txXfrm>
@@ -4185,12 +4185,12 @@
         <a:fontRef idx="minor"/>
       </dsp:style>
       <dsp:txBody>
-        <a:bodyPr spcFirstLastPara="0" vert="horz" wrap="square" lIns="125730" tIns="125730" rIns="125730" bIns="125730" numCol="1" spcCol="1270" anchor="t" anchorCtr="0">
+        <a:bodyPr spcFirstLastPara="0" vert="horz" wrap="square" lIns="110490" tIns="110490" rIns="110490" bIns="110490" numCol="1" spcCol="1270" anchor="t" anchorCtr="0">
           <a:noAutofit/>
         </a:bodyPr>
         <a:lstStyle/>
         <a:p>
-          <a:pPr marL="0" lvl="0" indent="0" algn="l" defTabSz="1466850">
+          <a:pPr marL="0" lvl="0" indent="0" algn="l" defTabSz="1289050">
             <a:lnSpc>
               <a:spcPct val="90000"/>
             </a:lnSpc>
@@ -4203,10 +4203,10 @@
             <a:buNone/>
           </a:pPr>
           <a:r>
-            <a:rPr lang="de-CH" sz="3300" kern="1200"/>
+            <a:rPr lang="de-CH" sz="2900" kern="1200"/>
             <a:t>Fazit</a:t>
           </a:r>
-          <a:endParaRPr lang="en-US" sz="3300" kern="1200"/>
+          <a:endParaRPr lang="en-US" sz="2900" kern="1200"/>
         </a:p>
       </dsp:txBody>
       <dsp:txXfrm>
@@ -4297,12 +4297,12 @@
         <a:fontRef idx="minor"/>
       </dsp:style>
       <dsp:txBody>
-        <a:bodyPr spcFirstLastPara="0" vert="horz" wrap="square" lIns="125730" tIns="125730" rIns="125730" bIns="125730" numCol="1" spcCol="1270" anchor="t" anchorCtr="0">
+        <a:bodyPr spcFirstLastPara="0" vert="horz" wrap="square" lIns="110490" tIns="110490" rIns="110490" bIns="110490" numCol="1" spcCol="1270" anchor="t" anchorCtr="0">
           <a:noAutofit/>
         </a:bodyPr>
         <a:lstStyle/>
         <a:p>
-          <a:pPr marL="0" lvl="0" indent="0" algn="l" defTabSz="1466850">
+          <a:pPr marL="0" lvl="0" indent="0" algn="l" defTabSz="1289050">
             <a:lnSpc>
               <a:spcPct val="90000"/>
             </a:lnSpc>
@@ -4315,10 +4315,10 @@
             <a:buNone/>
           </a:pPr>
           <a:r>
-            <a:rPr lang="de-CH" sz="3300" kern="1200"/>
+            <a:rPr lang="de-CH" sz="2900" kern="1200"/>
             <a:t>Quellenverzeichnis-Abspann</a:t>
           </a:r>
-          <a:endParaRPr lang="en-US" sz="3300" kern="1200"/>
+          <a:endParaRPr lang="en-US" sz="2900" kern="1200"/>
         </a:p>
       </dsp:txBody>
       <dsp:txXfrm>
@@ -4979,10 +4979,10 @@
             <a:buNone/>
           </a:pPr>
           <a:r>
-            <a:rPr lang="de-DE" sz="2500" kern="1200"/>
-            <a:t>Ich hoffe es hat euch gefallen! </a:t>
+            <a:rPr lang="de-CH" sz="2500" kern="1200" dirty="0"/>
+            <a:t>Ich hoffe, es hat euch gefallen!</a:t>
           </a:r>
-          <a:endParaRPr lang="en-US" sz="2500" kern="1200"/>
+          <a:endParaRPr lang="en-US" sz="2500" kern="1200" dirty="0"/>
         </a:p>
       </dsp:txBody>
       <dsp:txXfrm>
@@ -5139,8 +5139,8 @@
             <a:buNone/>
           </a:pPr>
           <a:r>
-            <a:rPr lang="de-DE" sz="2500" kern="1200" dirty="0"/>
-            <a:t>Wenn ihr noch fragen habt könnt ihr diese jetzt stellen.</a:t>
+            <a:rPr lang="de-CH" sz="2500" kern="1200" dirty="0"/>
+            <a:t>Wenn ihr noch Fragen habt, könnt ihr diese jetzt stellen.</a:t>
           </a:r>
           <a:endParaRPr lang="en-US" sz="2500" kern="1200" dirty="0"/>
         </a:p>
@@ -14070,7 +14070,7 @@
             <p:ph idx="1"/>
             <p:extLst>
               <p:ext uri="{D42A27DB-BD31-4B8C-83A1-F6EECF244321}">
-                <p14:modId xmlns:p14="http://schemas.microsoft.com/office/powerpoint/2010/main" val="3585108313"/>
+                <p14:modId xmlns:p14="http://schemas.microsoft.com/office/powerpoint/2010/main" val="234095329"/>
               </p:ext>
             </p:extLst>
           </p:nvPr>
@@ -14716,7 +14716,7 @@
           <a:p>
             <a:r>
               <a:rPr lang="de-CH" dirty="0"/>
-              <a:t>Milestone – Dashboard, Analyse &amp; Abschluss</a:t>
+              <a:t>Dashboard, Analyse &amp; Abschluss</a:t>
             </a:r>
           </a:p>
           <a:p>
@@ -15020,13 +15020,13 @@
           <a:p>
             <a:r>
               <a:rPr lang="de-DE" dirty="0"/>
-              <a:t>Zufrieden</a:t>
+              <a:t>Ideen Findung </a:t>
             </a:r>
           </a:p>
           <a:p>
             <a:r>
               <a:rPr lang="de-DE" dirty="0"/>
-              <a:t>Zeitaufteilung  </a:t>
+              <a:t>Dokumentation</a:t>
             </a:r>
           </a:p>
         </p:txBody>
@@ -15095,7 +15095,13 @@
           <a:p>
             <a:r>
               <a:rPr lang="de-DE" dirty="0"/>
-              <a:t> An manchen stellen keine Wiesen </a:t>
+              <a:t> An manchen stellen keine Wissen </a:t>
+            </a:r>
+          </a:p>
+          <a:p>
+            <a:r>
+              <a:rPr lang="de-DE" dirty="0"/>
+              <a:t>Dokumentation gelöscht </a:t>
             </a:r>
           </a:p>
         </p:txBody>
@@ -15429,17 +15435,26 @@
           <a:p>
             <a:r>
               <a:rPr lang="de-DE" dirty="0"/>
-              <a:t> Motivation</a:t>
+              <a:t>Unzufrieden </a:t>
             </a:r>
           </a:p>
           <a:p>
             <a:r>
-              <a:rPr lang="de-DE" dirty="0"/>
-              <a:t>Selber beweisen  </a:t>
+              <a:rPr lang="de-CH" dirty="0"/>
+              <a:t>Erkenntnisse zum Thema Stress</a:t>
             </a:r>
           </a:p>
           <a:p>
-            <a:endParaRPr lang="de-DE" dirty="0"/>
+            <a:r>
+              <a:rPr lang="de-CH" dirty="0"/>
+              <a:t>Umgang mit Problemen und Zeitmanagement</a:t>
+            </a:r>
+          </a:p>
+          <a:p>
+            <a:r>
+              <a:rPr lang="de-CH" dirty="0"/>
+              <a:t>Motivation</a:t>
+            </a:r>
           </a:p>
         </p:txBody>
       </p:sp>
@@ -15651,62 +15666,10 @@
           <a:bodyPr/>
           <a:lstStyle/>
           <a:p>
-            <a:pPr marL="0" indent="0">
-              <a:buNone/>
-            </a:pPr>
             <a:r>
-              <a:rPr lang="de-CH" u="sng" dirty="0">
-                <a:hlinkClick r:id="rId2"/>
-              </a:rPr>
-              <a:t>https://stackoverflow.com/questions/19482371/fix-access-denied-for-user-rootlocalhost-for-phpmyadmin</a:t>
+              <a:rPr lang="de-DE" dirty="0"/>
+              <a:t>Quellenverzeichnis ist in der Dokumentation zu finden</a:t>
             </a:r>
-            <a:r>
-              <a:rPr lang="de-CH" dirty="0"/>
-              <a:t> </a:t>
-            </a:r>
-          </a:p>
-          <a:p>
-            <a:pPr marL="0" indent="0">
-              <a:buNone/>
-            </a:pPr>
-            <a:r>
-              <a:rPr lang="de-CH" dirty="0"/>
-              <a:t> </a:t>
-            </a:r>
-            <a:r>
-              <a:rPr lang="de-CH" u="sng" dirty="0">
-                <a:hlinkClick r:id="rId3"/>
-              </a:rPr>
-              <a:t>https://www.w3schools.com/nodejs/nodejs_mysql.asp</a:t>
-            </a:r>
-            <a:endParaRPr lang="de-CH" dirty="0"/>
-          </a:p>
-          <a:p>
-            <a:pPr marL="0" indent="0">
-              <a:buNone/>
-            </a:pPr>
-            <a:r>
-              <a:rPr lang="de-CH" u="sng" dirty="0">
-                <a:hlinkClick r:id="rId4"/>
-              </a:rPr>
-              <a:t>https://www.npmjs.com/package/mysql2?activeTab=readme</a:t>
-            </a:r>
-            <a:endParaRPr lang="de-CH" dirty="0"/>
-          </a:p>
-          <a:p>
-            <a:pPr marL="0" indent="0">
-              <a:buNone/>
-            </a:pPr>
-            <a:r>
-              <a:rPr lang="de-CH" u="sng" dirty="0">
-                <a:hlinkClick r:id="rId5"/>
-              </a:rPr>
-              <a:t>https://www.geeksforgeeks.org/node-js/how-to-insert-request-body-into-a-mysql-database-using-express-js/</a:t>
-            </a:r>
-            <a:endParaRPr lang="de-CH" dirty="0"/>
-          </a:p>
-          <a:p>
-            <a:endParaRPr lang="de-DE" dirty="0"/>
           </a:p>
         </p:txBody>
       </p:sp>
@@ -15985,7 +15948,7 @@
             <p:ph idx="1"/>
             <p:extLst>
               <p:ext uri="{D42A27DB-BD31-4B8C-83A1-F6EECF244321}">
-                <p14:modId xmlns:p14="http://schemas.microsoft.com/office/powerpoint/2010/main" val="2593637565"/>
+                <p14:modId xmlns:p14="http://schemas.microsoft.com/office/powerpoint/2010/main" val="131329606"/>
               </p:ext>
             </p:extLst>
           </p:nvPr>
